--- a/03-课件PPT/讲次版/第6章-3-讲次 6-3 · 可观测性与监控告警.pptx
+++ b/03-课件PPT/讲次版/第6章-3-讲次 6-3 · 可观测性与监控告警.pptx
@@ -5129,60 +5129,21 @@
                 </a:solidFill>
                 <a:latin typeface="PingFang SC"/>
               </a:rPr>
-              <a:t>GraphQL Trace 查询实测,query { runs(state: "failed", tenant: "acme") {;  id goal spans { name ok durationMs };}};→ 返回失败任务的 span 树;下钻: 最慢 span 一目了然;# BFF 按需取字段,避免 N+1</a:t>
-            </a:r>
-          </a:p>
-        </p:txBody>
-      </p:sp>
-      <p:sp>
-        <p:nvSpPr>
-          <p:cNvPr id="5" name="TextBox 4"/>
-          <p:cNvSpPr txBox="1"/>
-          <p:nvPr/>
-        </p:nvSpPr>
-        <p:spPr>
-          <a:xfrm>
-            <a:off x="9334500" y="0"/>
-            <a:ext cx="2667000" cy="704850"/>
-          </a:xfrm>
-          <a:prstGeom prst="rect">
-            <a:avLst/>
-          </a:prstGeom>
-          <a:noFill/>
-        </p:spPr>
-        <p:txBody>
-          <a:bodyPr wrap="square" anchor="ctr">
-            <a:spAutoFit/>
-          </a:bodyPr>
-          <a:lstStyle/>
-          <a:p>
-            <a:pPr algn="r">
-              <a:lnSpc>
-                <a:spcPct val="100000"/>
-              </a:lnSpc>
-            </a:pPr>
-            <a:r>
-              <a:rPr sz="1100" b="0">
-                <a:solidFill>
-                  <a:srgbClr val="94A3B8"/>
-                </a:solidFill>
-                <a:latin typeface="PingFang SC"/>
-              </a:rPr>
-              <a:t>教学控制台同款查询</a:t>
-            </a:r>
-          </a:p>
-        </p:txBody>
-      </p:sp>
-      <p:sp>
-        <p:nvSpPr>
-          <p:cNvPr id="6" name="Rounded Rectangle 5"/>
-          <p:cNvSpPr/>
-          <p:nvPr/>
-        </p:nvSpPr>
-        <p:spPr>
-          <a:xfrm>
-            <a:off x="1333500" y="952500"/>
-            <a:ext cx="9525000" cy="5048250"/>
+              <a:t>GraphQL Trace 查询实测</a:t>
+            </a:r>
+          </a:p>
+        </p:txBody>
+      </p:sp>
+      <p:sp>
+        <p:nvSpPr>
+          <p:cNvPr id="5" name="Rounded Rectangle 4"/>
+          <p:cNvSpPr/>
+          <p:nvPr/>
+        </p:nvSpPr>
+        <p:spPr>
+          <a:xfrm>
+            <a:off x="1333500" y="1047750"/>
+            <a:ext cx="9525000" cy="2952750"/>
           </a:xfrm>
           <a:prstGeom prst="roundRect">
             <a:avLst>
@@ -5221,13 +5182,13 @@
       </p:sp>
       <p:sp>
         <p:nvSpPr>
-          <p:cNvPr id="7" name="Rectangle 6"/>
-          <p:cNvSpPr/>
-          <p:nvPr/>
-        </p:nvSpPr>
-        <p:spPr>
-          <a:xfrm>
-            <a:off x="1333500" y="952500"/>
+          <p:cNvPr id="6" name="Rectangle 5"/>
+          <p:cNvSpPr/>
+          <p:nvPr/>
+        </p:nvSpPr>
+        <p:spPr>
+          <a:xfrm>
+            <a:off x="1333500" y="1047750"/>
             <a:ext cx="9525000" cy="381000"/>
           </a:xfrm>
           <a:prstGeom prst="rect">
@@ -5265,13 +5226,13 @@
       </p:sp>
       <p:sp>
         <p:nvSpPr>
-          <p:cNvPr id="8" name="Rounded Rectangle 7"/>
-          <p:cNvSpPr/>
-          <p:nvPr/>
-        </p:nvSpPr>
-        <p:spPr>
-          <a:xfrm>
-            <a:off x="1504950" y="1085850"/>
+          <p:cNvPr id="7" name="Rounded Rectangle 6"/>
+          <p:cNvSpPr/>
+          <p:nvPr/>
+        </p:nvSpPr>
+        <p:spPr>
+          <a:xfrm>
+            <a:off x="1504950" y="1181100"/>
             <a:ext cx="123825" cy="123825"/>
           </a:xfrm>
           <a:prstGeom prst="roundRect">
@@ -5311,13 +5272,13 @@
       </p:sp>
       <p:sp>
         <p:nvSpPr>
-          <p:cNvPr id="9" name="Rounded Rectangle 8"/>
-          <p:cNvSpPr/>
-          <p:nvPr/>
-        </p:nvSpPr>
-        <p:spPr>
-          <a:xfrm>
-            <a:off x="1752600" y="1085850"/>
+          <p:cNvPr id="8" name="Rounded Rectangle 7"/>
+          <p:cNvSpPr/>
+          <p:nvPr/>
+        </p:nvSpPr>
+        <p:spPr>
+          <a:xfrm>
+            <a:off x="1752600" y="1181100"/>
             <a:ext cx="123825" cy="123825"/>
           </a:xfrm>
           <a:prstGeom prst="roundRect">
@@ -5357,13 +5318,13 @@
       </p:sp>
       <p:sp>
         <p:nvSpPr>
-          <p:cNvPr id="10" name="Rounded Rectangle 9"/>
-          <p:cNvSpPr/>
-          <p:nvPr/>
-        </p:nvSpPr>
-        <p:spPr>
-          <a:xfrm>
-            <a:off x="2000250" y="1085850"/>
+          <p:cNvPr id="9" name="Rounded Rectangle 8"/>
+          <p:cNvSpPr/>
+          <p:nvPr/>
+        </p:nvSpPr>
+        <p:spPr>
+          <a:xfrm>
+            <a:off x="2000250" y="1181100"/>
             <a:ext cx="123825" cy="123825"/>
           </a:xfrm>
           <a:prstGeom prst="roundRect">
@@ -5403,13 +5364,13 @@
       </p:sp>
       <p:sp>
         <p:nvSpPr>
-          <p:cNvPr id="11" name="TextBox 10"/>
+          <p:cNvPr id="10" name="TextBox 9"/>
           <p:cNvSpPr txBox="1"/>
           <p:nvPr/>
         </p:nvSpPr>
         <p:spPr>
           <a:xfrm>
-            <a:off x="2381250" y="952500"/>
+            <a:off x="2381250" y="1047750"/>
             <a:ext cx="8286750" cy="381000"/>
           </a:xfrm>
           <a:prstGeom prst="rect">
@@ -5442,14 +5403,14 @@
       </p:sp>
       <p:sp>
         <p:nvSpPr>
-          <p:cNvPr id="12" name="TextBox 11"/>
+          <p:cNvPr id="11" name="TextBox 10"/>
           <p:cNvSpPr txBox="1"/>
           <p:nvPr/>
         </p:nvSpPr>
         <p:spPr>
           <a:xfrm>
-            <a:off x="1562100" y="1485900"/>
-            <a:ext cx="9067800" cy="4381500"/>
+            <a:off x="1562100" y="1581150"/>
+            <a:ext cx="9067800" cy="2286000"/>
           </a:xfrm>
           <a:prstGeom prst="rect">
             <a:avLst/>
@@ -5474,14 +5435,94 @@
                 </a:solidFill>
                 <a:latin typeface="Menlo"/>
               </a:rPr>
-              <a:t>教学控制台同款查询</a:t>
-            </a:r>
-          </a:p>
-        </p:txBody>
-      </p:sp>
-      <p:sp>
-        <p:nvSpPr>
-          <p:cNvPr id="13" name="TextBox 12"/>
+              <a:t>query { runs(state: "failed", tenant: "acme") {</a:t>
+            </a:r>
+          </a:p>
+          <a:p>
+            <a:pPr>
+              <a:lnSpc>
+                <a:spcPct val="115000"/>
+              </a:lnSpc>
+            </a:pPr>
+            <a:r>
+              <a:rPr sz="1300">
+                <a:solidFill>
+                  <a:srgbClr val="CBD5E1"/>
+                </a:solidFill>
+                <a:latin typeface="Menlo"/>
+              </a:rPr>
+              <a:t>  id goal spans { name ok durationMs }</a:t>
+            </a:r>
+          </a:p>
+          <a:p>
+            <a:pPr>
+              <a:lnSpc>
+                <a:spcPct val="115000"/>
+              </a:lnSpc>
+            </a:pPr>
+            <a:r>
+              <a:rPr sz="1300">
+                <a:solidFill>
+                  <a:srgbClr val="CBD5E1"/>
+                </a:solidFill>
+                <a:latin typeface="Menlo"/>
+              </a:rPr>
+              <a:t>}}</a:t>
+            </a:r>
+          </a:p>
+          <a:p>
+            <a:pPr>
+              <a:lnSpc>
+                <a:spcPct val="115000"/>
+              </a:lnSpc>
+            </a:pPr>
+            <a:r>
+              <a:rPr sz="1300">
+                <a:solidFill>
+                  <a:srgbClr val="CBD5E1"/>
+                </a:solidFill>
+                <a:latin typeface="Menlo"/>
+              </a:rPr>
+              <a:t>→ 返回失败任务的 span 树</a:t>
+            </a:r>
+          </a:p>
+          <a:p>
+            <a:pPr>
+              <a:lnSpc>
+                <a:spcPct val="115000"/>
+              </a:lnSpc>
+            </a:pPr>
+            <a:r>
+              <a:rPr sz="1300">
+                <a:solidFill>
+                  <a:srgbClr val="CBD5E1"/>
+                </a:solidFill>
+                <a:latin typeface="Menlo"/>
+              </a:rPr>
+              <a:t>下钻: 最慢 span 一目了然</a:t>
+            </a:r>
+          </a:p>
+          <a:p>
+            <a:pPr>
+              <a:lnSpc>
+                <a:spcPct val="115000"/>
+              </a:lnSpc>
+            </a:pPr>
+            <a:r>
+              <a:rPr sz="1300">
+                <a:solidFill>
+                  <a:srgbClr val="94A3B8"/>
+                </a:solidFill>
+                <a:latin typeface="Menlo"/>
+              </a:rPr>
+              <a:t># BFF 按需取字段,避免 N+1</a:t>
+            </a:r>
+          </a:p>
+        </p:txBody>
+      </p:sp>
+      <p:sp>
+        <p:nvSpPr>
+          <p:cNvPr id="12" name="TextBox 11"/>
           <p:cNvSpPr txBox="1"/>
           <p:nvPr/>
         </p:nvSpPr>
@@ -5520,7 +5561,7 @@
       </p:sp>
       <p:sp>
         <p:nvSpPr>
-          <p:cNvPr id="14" name="TextBox 13"/>
+          <p:cNvPr id="13" name="TextBox 12"/>
           <p:cNvSpPr txBox="1"/>
           <p:nvPr/>
         </p:nvSpPr>
@@ -7910,46 +7951,7 @@
       </p:sp>
       <p:sp>
         <p:nvSpPr>
-          <p:cNvPr id="5" name="TextBox 4"/>
-          <p:cNvSpPr txBox="1"/>
-          <p:nvPr/>
-        </p:nvSpPr>
-        <p:spPr>
-          <a:xfrm>
-            <a:off x="9334500" y="0"/>
-            <a:ext cx="2667000" cy="704850"/>
-          </a:xfrm>
-          <a:prstGeom prst="rect">
-            <a:avLst/>
-          </a:prstGeom>
-          <a:noFill/>
-        </p:spPr>
-        <p:txBody>
-          <a:bodyPr wrap="square" anchor="ctr">
-            <a:spAutoFit/>
-          </a:bodyPr>
-          <a:lstStyle/>
-          <a:p>
-            <a:pPr algn="r">
-              <a:lnSpc>
-                <a:spcPct val="100000"/>
-              </a:lnSpc>
-            </a:pPr>
-            <a:r>
-              <a:rPr sz="1100" b="0">
-                <a:solidFill>
-                  <a:srgbClr val="94A3B8"/>
-                </a:solidFill>
-                <a:latin typeface="PingFang SC"/>
-              </a:rPr>
-              <a:t>95%^任务成功率^SLO;5%^人工接管率^上限;70%^成本节省^缓存+路由;4.5^分^满意度|周报看趋势不看绝对值</a:t>
-            </a:r>
-          </a:p>
-        </p:txBody>
-      </p:sp>
-      <p:sp>
-        <p:nvSpPr>
-          <p:cNvPr id="6" name="Rounded Rectangle 5"/>
+          <p:cNvPr id="5" name="Rounded Rectangle 4"/>
           <p:cNvSpPr/>
           <p:nvPr/>
         </p:nvSpPr>
@@ -7997,7 +7999,7 @@
       </p:sp>
       <p:sp>
         <p:nvSpPr>
-          <p:cNvPr id="7" name="Rectangle 6"/>
+          <p:cNvPr id="6" name="Rectangle 5"/>
           <p:cNvSpPr/>
           <p:nvPr/>
         </p:nvSpPr>
@@ -8041,7 +8043,7 @@
       </p:sp>
       <p:sp>
         <p:nvSpPr>
-          <p:cNvPr id="8" name="TextBox 7"/>
+          <p:cNvPr id="7" name="TextBox 6"/>
           <p:cNvSpPr txBox="1"/>
           <p:nvPr/>
         </p:nvSpPr>
@@ -8080,7 +8082,7 @@
       </p:sp>
       <p:sp>
         <p:nvSpPr>
-          <p:cNvPr id="9" name="TextBox 8"/>
+          <p:cNvPr id="8" name="TextBox 7"/>
           <p:cNvSpPr txBox="1"/>
           <p:nvPr/>
         </p:nvSpPr>
@@ -8119,7 +8121,7 @@
       </p:sp>
       <p:sp>
         <p:nvSpPr>
-          <p:cNvPr id="10" name="TextBox 9"/>
+          <p:cNvPr id="9" name="TextBox 8"/>
           <p:cNvSpPr txBox="1"/>
           <p:nvPr/>
         </p:nvSpPr>
@@ -8158,7 +8160,7 @@
       </p:sp>
       <p:sp>
         <p:nvSpPr>
-          <p:cNvPr id="11" name="Rounded Rectangle 10"/>
+          <p:cNvPr id="10" name="Rounded Rectangle 9"/>
           <p:cNvSpPr/>
           <p:nvPr/>
         </p:nvSpPr>
@@ -8206,7 +8208,7 @@
       </p:sp>
       <p:sp>
         <p:nvSpPr>
-          <p:cNvPr id="12" name="Rectangle 11"/>
+          <p:cNvPr id="11" name="Rectangle 10"/>
           <p:cNvSpPr/>
           <p:nvPr/>
         </p:nvSpPr>
@@ -8250,7 +8252,7 @@
       </p:sp>
       <p:sp>
         <p:nvSpPr>
-          <p:cNvPr id="13" name="TextBox 12"/>
+          <p:cNvPr id="12" name="TextBox 11"/>
           <p:cNvSpPr txBox="1"/>
           <p:nvPr/>
         </p:nvSpPr>
@@ -8289,7 +8291,7 @@
       </p:sp>
       <p:sp>
         <p:nvSpPr>
-          <p:cNvPr id="14" name="TextBox 13"/>
+          <p:cNvPr id="13" name="TextBox 12"/>
           <p:cNvSpPr txBox="1"/>
           <p:nvPr/>
         </p:nvSpPr>
@@ -8328,7 +8330,7 @@
       </p:sp>
       <p:sp>
         <p:nvSpPr>
-          <p:cNvPr id="15" name="TextBox 14"/>
+          <p:cNvPr id="14" name="TextBox 13"/>
           <p:cNvSpPr txBox="1"/>
           <p:nvPr/>
         </p:nvSpPr>
@@ -8367,7 +8369,7 @@
       </p:sp>
       <p:sp>
         <p:nvSpPr>
-          <p:cNvPr id="16" name="Rounded Rectangle 15"/>
+          <p:cNvPr id="15" name="Rounded Rectangle 14"/>
           <p:cNvSpPr/>
           <p:nvPr/>
         </p:nvSpPr>
@@ -8415,7 +8417,7 @@
       </p:sp>
       <p:sp>
         <p:nvSpPr>
-          <p:cNvPr id="17" name="Rectangle 16"/>
+          <p:cNvPr id="16" name="Rectangle 15"/>
           <p:cNvSpPr/>
           <p:nvPr/>
         </p:nvSpPr>
@@ -8459,7 +8461,7 @@
       </p:sp>
       <p:sp>
         <p:nvSpPr>
-          <p:cNvPr id="18" name="TextBox 17"/>
+          <p:cNvPr id="17" name="TextBox 16"/>
           <p:cNvSpPr txBox="1"/>
           <p:nvPr/>
         </p:nvSpPr>
@@ -8498,7 +8500,7 @@
       </p:sp>
       <p:sp>
         <p:nvSpPr>
-          <p:cNvPr id="19" name="TextBox 18"/>
+          <p:cNvPr id="18" name="TextBox 17"/>
           <p:cNvSpPr txBox="1"/>
           <p:nvPr/>
         </p:nvSpPr>
@@ -8537,7 +8539,7 @@
       </p:sp>
       <p:sp>
         <p:nvSpPr>
-          <p:cNvPr id="20" name="TextBox 19"/>
+          <p:cNvPr id="19" name="TextBox 18"/>
           <p:cNvSpPr txBox="1"/>
           <p:nvPr/>
         </p:nvSpPr>
@@ -8576,7 +8578,7 @@
       </p:sp>
       <p:sp>
         <p:nvSpPr>
-          <p:cNvPr id="21" name="Rounded Rectangle 20"/>
+          <p:cNvPr id="20" name="Rounded Rectangle 19"/>
           <p:cNvSpPr/>
           <p:nvPr/>
         </p:nvSpPr>
@@ -8624,7 +8626,7 @@
       </p:sp>
       <p:sp>
         <p:nvSpPr>
-          <p:cNvPr id="22" name="Rectangle 21"/>
+          <p:cNvPr id="21" name="Rectangle 20"/>
           <p:cNvSpPr/>
           <p:nvPr/>
         </p:nvSpPr>
@@ -8668,7 +8670,7 @@
       </p:sp>
       <p:sp>
         <p:nvSpPr>
-          <p:cNvPr id="23" name="TextBox 22"/>
+          <p:cNvPr id="22" name="TextBox 21"/>
           <p:cNvSpPr txBox="1"/>
           <p:nvPr/>
         </p:nvSpPr>
@@ -8707,7 +8709,7 @@
       </p:sp>
       <p:sp>
         <p:nvSpPr>
-          <p:cNvPr id="24" name="TextBox 23"/>
+          <p:cNvPr id="23" name="TextBox 22"/>
           <p:cNvSpPr txBox="1"/>
           <p:nvPr/>
         </p:nvSpPr>
@@ -8746,7 +8748,7 @@
       </p:sp>
       <p:sp>
         <p:nvSpPr>
-          <p:cNvPr id="25" name="TextBox 24"/>
+          <p:cNvPr id="24" name="TextBox 23"/>
           <p:cNvSpPr txBox="1"/>
           <p:nvPr/>
         </p:nvSpPr>
@@ -8778,14 +8780,14 @@
                 </a:solidFill>
                 <a:latin typeface="PingFang SC"/>
               </a:rPr>
-              <a:t>满意度|周报看趋势不看绝对值</a:t>
-            </a:r>
-          </a:p>
-        </p:txBody>
-      </p:sp>
-      <p:sp>
-        <p:nvSpPr>
-          <p:cNvPr id="26" name="TextBox 25"/>
+              <a:t>满意度</a:t>
+            </a:r>
+          </a:p>
+        </p:txBody>
+      </p:sp>
+      <p:sp>
+        <p:nvSpPr>
+          <p:cNvPr id="25" name="TextBox 24"/>
           <p:cNvSpPr txBox="1"/>
           <p:nvPr/>
         </p:nvSpPr>
@@ -8824,7 +8826,7 @@
       </p:sp>
       <p:sp>
         <p:nvSpPr>
-          <p:cNvPr id="27" name="TextBox 26"/>
+          <p:cNvPr id="26" name="TextBox 25"/>
           <p:cNvSpPr txBox="1"/>
           <p:nvPr/>
         </p:nvSpPr>
@@ -10003,7 +10005,7 @@
       </p:sp>
       <p:pic>
         <p:nvPicPr>
-          <p:cNvPr id="5" name="Picture 4" descr="chart_823918.png"/>
+          <p:cNvPr id="5" name="Picture 4" descr="chart_326881.png"/>
           <p:cNvPicPr>
             <a:picLocks noChangeAspect="1"/>
           </p:cNvPicPr>
@@ -12559,7 +12561,7 @@
                 </a:solidFill>
                 <a:latin typeface="PingFang SC"/>
               </a:rPr>
-              <a:t>拦截率/高危次数/SQL拦截|北极星:任务成功率</a:t>
+              <a:t>拦截率/高危次数/SQL拦截</a:t>
             </a:r>
           </a:p>
         </p:txBody>
@@ -15438,53 +15440,14 @@
       </p:sp>
       <p:sp>
         <p:nvSpPr>
-          <p:cNvPr id="5" name="TextBox 4"/>
-          <p:cNvSpPr txBox="1"/>
-          <p:nvPr/>
-        </p:nvSpPr>
-        <p:spPr>
-          <a:xfrm>
-            <a:off x="9334500" y="0"/>
-            <a:ext cx="2667000" cy="704850"/>
-          </a:xfrm>
-          <a:prstGeom prst="rect">
-            <a:avLst/>
-          </a:prstGeom>
-          <a:noFill/>
-        </p:spPr>
-        <p:txBody>
-          <a:bodyPr wrap="square" anchor="ctr">
-            <a:spAutoFit/>
-          </a:bodyPr>
-          <a:lstStyle/>
-          <a:p>
-            <a:pPr algn="r">
-              <a:lnSpc>
-                <a:spcPct val="100000"/>
-              </a:lnSpc>
-            </a:pPr>
-            <a:r>
-              <a:rPr sz="1100" b="0">
-                <a:solidFill>
-                  <a:srgbClr val="94A3B8"/>
-                </a:solidFill>
-                <a:latin typeface="PingFang SC"/>
-              </a:rPr>
-              <a:t>$ POST /v1/chat/completions(注入文本);HTTP 400  injection blocked;$ POST + x-idempotency-key: replay-1(第2次);HTTP 429  replay detected;$ 14 连发请求;8×200 → 6×429 rate limited;$ GET /metrics;platform_security_blocks_total{type="injection"} 1|全部真实 curl 记录</a:t>
-            </a:r>
-          </a:p>
-        </p:txBody>
-      </p:sp>
-      <p:sp>
-        <p:nvSpPr>
-          <p:cNvPr id="6" name="Rounded Rectangle 5"/>
-          <p:cNvSpPr/>
-          <p:nvPr/>
-        </p:nvSpPr>
-        <p:spPr>
-          <a:xfrm>
-            <a:off x="1333500" y="952500"/>
-            <a:ext cx="9525000" cy="5048250"/>
+          <p:cNvPr id="5" name="Rounded Rectangle 4"/>
+          <p:cNvSpPr/>
+          <p:nvPr/>
+        </p:nvSpPr>
+        <p:spPr>
+          <a:xfrm>
+            <a:off x="1333500" y="1047750"/>
+            <a:ext cx="9525000" cy="3524250"/>
           </a:xfrm>
           <a:prstGeom prst="roundRect">
             <a:avLst>
@@ -15523,13 +15486,13 @@
       </p:sp>
       <p:sp>
         <p:nvSpPr>
-          <p:cNvPr id="7" name="Rectangle 6"/>
-          <p:cNvSpPr/>
-          <p:nvPr/>
-        </p:nvSpPr>
-        <p:spPr>
-          <a:xfrm>
-            <a:off x="1333500" y="952500"/>
+          <p:cNvPr id="6" name="Rectangle 5"/>
+          <p:cNvSpPr/>
+          <p:nvPr/>
+        </p:nvSpPr>
+        <p:spPr>
+          <a:xfrm>
+            <a:off x="1333500" y="1047750"/>
             <a:ext cx="9525000" cy="381000"/>
           </a:xfrm>
           <a:prstGeom prst="rect">
@@ -15567,13 +15530,13 @@
       </p:sp>
       <p:sp>
         <p:nvSpPr>
-          <p:cNvPr id="8" name="Rounded Rectangle 7"/>
-          <p:cNvSpPr/>
-          <p:nvPr/>
-        </p:nvSpPr>
-        <p:spPr>
-          <a:xfrm>
-            <a:off x="1504950" y="1085850"/>
+          <p:cNvPr id="7" name="Rounded Rectangle 6"/>
+          <p:cNvSpPr/>
+          <p:nvPr/>
+        </p:nvSpPr>
+        <p:spPr>
+          <a:xfrm>
+            <a:off x="1504950" y="1181100"/>
             <a:ext cx="123825" cy="123825"/>
           </a:xfrm>
           <a:prstGeom prst="roundRect">
@@ -15613,13 +15576,13 @@
       </p:sp>
       <p:sp>
         <p:nvSpPr>
-          <p:cNvPr id="9" name="Rounded Rectangle 8"/>
-          <p:cNvSpPr/>
-          <p:nvPr/>
-        </p:nvSpPr>
-        <p:spPr>
-          <a:xfrm>
-            <a:off x="1752600" y="1085850"/>
+          <p:cNvPr id="8" name="Rounded Rectangle 7"/>
+          <p:cNvSpPr/>
+          <p:nvPr/>
+        </p:nvSpPr>
+        <p:spPr>
+          <a:xfrm>
+            <a:off x="1752600" y="1181100"/>
             <a:ext cx="123825" cy="123825"/>
           </a:xfrm>
           <a:prstGeom prst="roundRect">
@@ -15659,13 +15622,13 @@
       </p:sp>
       <p:sp>
         <p:nvSpPr>
-          <p:cNvPr id="10" name="Rounded Rectangle 9"/>
-          <p:cNvSpPr/>
-          <p:nvPr/>
-        </p:nvSpPr>
-        <p:spPr>
-          <a:xfrm>
-            <a:off x="2000250" y="1085850"/>
+          <p:cNvPr id="9" name="Rounded Rectangle 8"/>
+          <p:cNvSpPr/>
+          <p:nvPr/>
+        </p:nvSpPr>
+        <p:spPr>
+          <a:xfrm>
+            <a:off x="2000250" y="1181100"/>
             <a:ext cx="123825" cy="123825"/>
           </a:xfrm>
           <a:prstGeom prst="roundRect">
@@ -15705,13 +15668,13 @@
       </p:sp>
       <p:sp>
         <p:nvSpPr>
-          <p:cNvPr id="11" name="TextBox 10"/>
+          <p:cNvPr id="10" name="TextBox 9"/>
           <p:cNvSpPr txBox="1"/>
           <p:nvPr/>
         </p:nvSpPr>
         <p:spPr>
           <a:xfrm>
-            <a:off x="2381250" y="952500"/>
+            <a:off x="2381250" y="1047750"/>
             <a:ext cx="8286750" cy="381000"/>
           </a:xfrm>
           <a:prstGeom prst="rect">
@@ -15744,14 +15707,14 @@
       </p:sp>
       <p:sp>
         <p:nvSpPr>
-          <p:cNvPr id="12" name="TextBox 11"/>
+          <p:cNvPr id="11" name="TextBox 10"/>
           <p:cNvSpPr txBox="1"/>
           <p:nvPr/>
         </p:nvSpPr>
         <p:spPr>
           <a:xfrm>
-            <a:off x="1562100" y="1485900"/>
-            <a:ext cx="9067800" cy="4381500"/>
+            <a:off x="1562100" y="1581150"/>
+            <a:ext cx="9067800" cy="2857500"/>
           </a:xfrm>
           <a:prstGeom prst="rect">
             <a:avLst/>
@@ -15895,7 +15858,7 @@
       </p:sp>
       <p:sp>
         <p:nvSpPr>
-          <p:cNvPr id="13" name="TextBox 12"/>
+          <p:cNvPr id="12" name="TextBox 11"/>
           <p:cNvSpPr txBox="1"/>
           <p:nvPr/>
         </p:nvSpPr>
@@ -15934,7 +15897,7 @@
       </p:sp>
       <p:sp>
         <p:nvSpPr>
-          <p:cNvPr id="14" name="TextBox 13"/>
+          <p:cNvPr id="13" name="TextBox 12"/>
           <p:cNvSpPr txBox="1"/>
           <p:nvPr/>
         </p:nvSpPr>
@@ -29552,7 +29515,7 @@
                 </a:solidFill>
                 <a:latin typeface="PingFang SC"/>
               </a:rPr>
-              <a:t>metrics 上报|每跳独立超时预算(TBP)</a:t>
+              <a:t>metrics 上报</a:t>
             </a:r>
           </a:p>
         </p:txBody>

--- a/03-课件PPT/讲次版/第6章-3-讲次 6-3 · 可观测性与监控告警.pptx
+++ b/03-课件PPT/讲次版/第6章-3-讲次 6-3 · 可观测性与监控告警.pptx
@@ -10005,7 +10005,7 @@
       </p:sp>
       <p:pic>
         <p:nvPicPr>
-          <p:cNvPr id="5" name="Picture 4" descr="chart_326881.png"/>
+          <p:cNvPr id="5" name="Picture 4" descr="chart_273537.png"/>
           <p:cNvPicPr>
             <a:picLocks noChangeAspect="1"/>
           </p:cNvPicPr>
